--- a/slides/computerScience_day7.pptx
+++ b/slides/computerScience_day7.pptx
@@ -7900,20 +7900,20 @@
           <a:lstStyle/>
           <a:p>
             <a:r>
-              <a:rPr kumimoji="1" lang="en-US" altLang="ja-JP" dirty="0"/>
+              <a:rPr kumimoji="1" lang="en-US" altLang="ja-JP"/>
               <a:t>[</a:t>
             </a:r>
             <a:r>
-              <a:rPr kumimoji="1" lang="en-US" altLang="ja-JP" dirty="0">
+              <a:rPr kumimoji="1" lang="en-US" altLang="ja-JP">
                 <a:solidFill>
                   <a:schemeClr val="accent1"/>
                 </a:solidFill>
                 <a:latin typeface="+mj-lt"/>
               </a:rPr>
-              <a:t>25</a:t>
-            </a:r>
-            <a:r>
-              <a:rPr kumimoji="1" lang="en-US" altLang="ja-JP" dirty="0">
+              <a:t>26</a:t>
+            </a:r>
+            <a:r>
+              <a:rPr kumimoji="1" lang="en-US" altLang="ja-JP">
                 <a:latin typeface="+mj-lt"/>
               </a:rPr>
               <a:t>-day07kk</a:t>
